--- a/AUTOCAD INTECAP/apuntes powerpoint/CLASE 9, Lunes 16 marzo.pptx
+++ b/AUTOCAD INTECAP/apuntes powerpoint/CLASE 9, Lunes 16 marzo.pptx
@@ -1504,6 +1504,35 @@
 </inkml:ink>
 </file>
 
+<file path=ppt/ink/ink50.xml><?xml version="1.0" encoding="utf-8"?>
+<inkml:ink xmlns:inkml="http://www.w3.org/2003/InkML">
+  <inkml:definitions>
+    <inkml:context xml:id="ctx0">
+      <inkml:inkSource xml:id="inkSrc0">
+        <inkml:traceFormat>
+          <inkml:channel name="X" type="integer" min="-2.14748E9" max="2.14748E9" units="cm"/>
+          <inkml:channel name="Y" type="integer" min="-2.14748E9" max="2.14748E9" units="cm"/>
+        </inkml:traceFormat>
+        <inkml:channelProperties>
+          <inkml:channelProperty channel="X" name="resolution" value="1000" units="1/cm"/>
+          <inkml:channelProperty channel="Y" name="resolution" value="1000" units="1/cm"/>
+        </inkml:channelProperties>
+      </inkml:inkSource>
+      <inkml:timestamp xml:id="ts0" timeString="2026-04-03T00:39:45.235"/>
+    </inkml:context>
+    <inkml:brush xml:id="br0">
+      <inkml:brushProperty name="width" value="0.3" units="cm"/>
+      <inkml:brushProperty name="height" value="0.6" units="cm"/>
+      <inkml:brushProperty name="color" value="#FFFC00"/>
+      <inkml:brushProperty name="tip" value="rectangle"/>
+      <inkml:brushProperty name="rasterOp" value="maskPen"/>
+      <inkml:brushProperty name="ignorePressure" value="1"/>
+    </inkml:brush>
+  </inkml:definitions>
+  <inkml:trace contextRef="#ctx0" brushRef="#br0">4066 500,'-5'-4,"-1"0,0 1,0 0,0 0,0 0,0 1,-1 0,1 0,-1 1,1 0,-1 0,0 0,1 1,-13 1,-4-2,-373-14,-130-7,-210-45,-134-9,-3 52,765 25,-309 23,406-21,33 0,232 4,-122-5,220 6,682 38,3 50,-919-83,-115-12,0-1,0 1,0-1,-1 0,1 0,0 0,0 0,0-1,0 1,0-1,0 1,4-3,-8 2,0-1,1 1,-1 0,0 0,0 0,0 0,0 0,0 0,0 0,0 0,-1 0,1 0,0 1,0-1,-1 0,1 1,0-1,-1 1,1 0,-1-1,-2 1,-28-12,0 3,-1 0,-56-6,-104 1,142 11,-283-11,-348-29,163-38,471 71,-50-17,96 27,1 0,-1-1,1 1,-1-1,1 0,-1 1,1-1,0 0,-1 0,1 0,0 0,0 0,-1 0,0-2,2 2,0 1,1-1,-1 0,0 1,1-1,-1 1,1-1,-1 1,1-1,-1 1,1-1,-1 1,1 0,-1-1,1 1,-1 0,1-1,0 1,-1 0,1 0,-1 0,1 0,0-1,-1 1,1 0,0 0,-1 0,1 0,1 0,30-3,1 2,49 3,451 49,25 31,-296-41,402 67,199 29,-776-124,0-4,114-2,-190-7,0 0,-1 0,1-1,-1-1,1 0,-1 0,1-1,-1 0,0-1,0 0,-1-1,17-10,-25 15,0-1,0 1,-1-1,1 1,0-1,0 0,0 0,-1 1,1-1,0 0,-1 0,1 0,-1 1,1-1,-1 0,0 0,1 0,-1 0,0 0,1 0,-1 0,0 0,0 0,0 0,0 0,0 0,0 0,0 0,0 0,-1 0,1 0,0 0,-1 0,1 0,-1-1,-1-1,-1 1,0 0,1 0,-1 0,0 0,0 0,0 1,-1-1,1 1,0 0,-6-1,-42-9,0 2,0 3,-67 0,97 5,-241-7,-1381 5,1275 5,257-3,30 0,-127 13,188-5,20-6,0-1,0 1,1-1,-1 1,0 0,1-1,-1 1,1-1,-1 1,1-1,-1 0,1 1,-1-1,1 1,-1-1,1 0,0 1,-1-1,1 0,-1 0,1 1,0-1,-1 0,1 0,1 0,134 32,149 20,147 16,-273-43,1098 174,-15 28,-1106-198,167 26,-275-56,-28 1,0-1,0 1,0 0,0-1,0 1,0-1,0 1,0-1,0 1,0 0,0-1,0 1,0-1,0 1,0 0,-1-1,1 1,0 0,0-1,0 1,-1 0,1-1,0 1,-1 0,1-1,0 1,-1 0,1 0,0-1,-1 1,1 0,0 0,-1 0,1 0,-1-1,1 1,0 0,-1 0,1 0,-1 0,-38-20,-63-23,-201-64,-154-29,-144-17,-458-60,-19 37,-265-48,1323 221,-26-7,47 10,-1 0,0 0,0 0,0 0,0 0,0 0,0 0,0 0,0 0,0 0,0 0,0 0,0 0,1 0,-1-1,0 1,0 0,0 0,0 0,0 0,0 0,0 0,0 0,0 0,0 0,0 0,0 0,0 0,0 0,0-1,0 1,0 0,0 0,0 0,0 0,0 0,0 0,0 0,0 0,0 0,0 0,0-1,25 1,399 1,814-10,-1150 7,-8 2,0-4,-1-3,121-27,-184 30,0-1,27-13,0-9</inkml:trace>
+</inkml:ink>
+</file>
+
 <file path=ppt/ink/ink6.xml><?xml version="1.0" encoding="utf-8"?>
 <inkml:ink xmlns:inkml="http://www.w3.org/2003/InkML">
   <inkml:definitions>
@@ -8220,8 +8249,8 @@
           </a:prstGeom>
         </p:spPr>
       </p:pic>
-      <mc:AlternateContent xmlns:mc="http://schemas.openxmlformats.org/markup-compatibility/2006">
-        <mc:Choice xmlns:p14="http://schemas.microsoft.com/office/powerpoint/2010/main" Requires="p14">
+      <mc:AlternateContent xmlns:mc="http://schemas.openxmlformats.org/markup-compatibility/2006" xmlns:p14="http://schemas.microsoft.com/office/powerpoint/2010/main">
+        <mc:Choice Requires="p14">
           <p:contentPart p14:bwMode="auto" r:id="rId4">
             <p14:nvContentPartPr>
               <p14:cNvPr id="7" name="Entrada de lápiz 6">
@@ -8240,7 +8269,7 @@
             </p14:xfrm>
           </p:contentPart>
         </mc:Choice>
-        <mc:Fallback>
+        <mc:Fallback xmlns="">
           <p:pic>
             <p:nvPicPr>
               <p:cNvPr id="7" name="Entrada de lápiz 6">
@@ -9036,8 +9065,8 @@
           </a:prstGeom>
         </p:spPr>
       </p:pic>
-      <mc:AlternateContent xmlns:mc="http://schemas.openxmlformats.org/markup-compatibility/2006">
-        <mc:Choice xmlns:p14="http://schemas.microsoft.com/office/powerpoint/2010/main" Requires="p14">
+      <mc:AlternateContent xmlns:mc="http://schemas.openxmlformats.org/markup-compatibility/2006" xmlns:p14="http://schemas.microsoft.com/office/powerpoint/2010/main">
+        <mc:Choice Requires="p14">
           <p:contentPart p14:bwMode="auto" r:id="rId3">
             <p14:nvContentPartPr>
               <p14:cNvPr id="5" name="Entrada de lápiz 4">
@@ -9056,7 +9085,7 @@
             </p14:xfrm>
           </p:contentPart>
         </mc:Choice>
-        <mc:Fallback>
+        <mc:Fallback xmlns="">
           <p:pic>
             <p:nvPicPr>
               <p:cNvPr id="5" name="Entrada de lápiz 4">
@@ -9172,8 +9201,8 @@
           </a:prstGeom>
         </p:spPr>
       </p:pic>
-      <mc:AlternateContent xmlns:mc="http://schemas.openxmlformats.org/markup-compatibility/2006">
-        <mc:Choice xmlns:p14="http://schemas.microsoft.com/office/powerpoint/2010/main" Requires="p14">
+      <mc:AlternateContent xmlns:mc="http://schemas.openxmlformats.org/markup-compatibility/2006" xmlns:p14="http://schemas.microsoft.com/office/powerpoint/2010/main">
+        <mc:Choice Requires="p14">
           <p:contentPart p14:bwMode="auto" r:id="rId3">
             <p14:nvContentPartPr>
               <p14:cNvPr id="5" name="Entrada de lápiz 4">
@@ -9192,7 +9221,7 @@
             </p14:xfrm>
           </p:contentPart>
         </mc:Choice>
-        <mc:Fallback>
+        <mc:Fallback xmlns="">
           <p:pic>
             <p:nvPicPr>
               <p:cNvPr id="5" name="Entrada de lápiz 4">
@@ -9223,8 +9252,8 @@
           </p:pic>
         </mc:Fallback>
       </mc:AlternateContent>
-      <mc:AlternateContent xmlns:mc="http://schemas.openxmlformats.org/markup-compatibility/2006">
-        <mc:Choice xmlns:p14="http://schemas.microsoft.com/office/powerpoint/2010/main" Requires="p14">
+      <mc:AlternateContent xmlns:mc="http://schemas.openxmlformats.org/markup-compatibility/2006" xmlns:p14="http://schemas.microsoft.com/office/powerpoint/2010/main">
+        <mc:Choice Requires="p14">
           <p:contentPart p14:bwMode="auto" r:id="rId5">
             <p14:nvContentPartPr>
               <p14:cNvPr id="6" name="Entrada de lápiz 5">
@@ -9243,7 +9272,7 @@
             </p14:xfrm>
           </p:contentPart>
         </mc:Choice>
-        <mc:Fallback>
+        <mc:Fallback xmlns="">
           <p:pic>
             <p:nvPicPr>
               <p:cNvPr id="6" name="Entrada de lápiz 5">
@@ -9359,8 +9388,8 @@
           </a:prstGeom>
         </p:spPr>
       </p:pic>
-      <mc:AlternateContent xmlns:mc="http://schemas.openxmlformats.org/markup-compatibility/2006">
-        <mc:Choice xmlns:p14="http://schemas.microsoft.com/office/powerpoint/2010/main" Requires="p14">
+      <mc:AlternateContent xmlns:mc="http://schemas.openxmlformats.org/markup-compatibility/2006" xmlns:p14="http://schemas.microsoft.com/office/powerpoint/2010/main">
+        <mc:Choice Requires="p14">
           <p:contentPart p14:bwMode="auto" r:id="rId3">
             <p14:nvContentPartPr>
               <p14:cNvPr id="5" name="Entrada de lápiz 4">
@@ -9379,7 +9408,7 @@
             </p14:xfrm>
           </p:contentPart>
         </mc:Choice>
-        <mc:Fallback>
+        <mc:Fallback xmlns="">
           <p:pic>
             <p:nvPicPr>
               <p:cNvPr id="5" name="Entrada de lápiz 4">
@@ -9700,8 +9729,8 @@
           </a:prstGeom>
         </p:spPr>
       </p:pic>
-      <mc:AlternateContent xmlns:mc="http://schemas.openxmlformats.org/markup-compatibility/2006">
-        <mc:Choice xmlns:p14="http://schemas.microsoft.com/office/powerpoint/2010/main" Requires="p14">
+      <mc:AlternateContent xmlns:mc="http://schemas.openxmlformats.org/markup-compatibility/2006" xmlns:p14="http://schemas.microsoft.com/office/powerpoint/2010/main">
+        <mc:Choice Requires="p14">
           <p:contentPart p14:bwMode="auto" r:id="rId3">
             <p14:nvContentPartPr>
               <p14:cNvPr id="5" name="Entrada de lápiz 4">
@@ -9720,7 +9749,7 @@
             </p14:xfrm>
           </p:contentPart>
         </mc:Choice>
-        <mc:Fallback>
+        <mc:Fallback xmlns="">
           <p:pic>
             <p:nvPicPr>
               <p:cNvPr id="5" name="Entrada de lápiz 4">
@@ -9836,8 +9865,8 @@
           </a:prstGeom>
         </p:spPr>
       </p:pic>
-      <mc:AlternateContent xmlns:mc="http://schemas.openxmlformats.org/markup-compatibility/2006">
-        <mc:Choice xmlns:p14="http://schemas.microsoft.com/office/powerpoint/2010/main" Requires="p14">
+      <mc:AlternateContent xmlns:mc="http://schemas.openxmlformats.org/markup-compatibility/2006" xmlns:p14="http://schemas.microsoft.com/office/powerpoint/2010/main">
+        <mc:Choice Requires="p14">
           <p:contentPart p14:bwMode="auto" r:id="rId3">
             <p14:nvContentPartPr>
               <p14:cNvPr id="5" name="Entrada de lápiz 4">
@@ -9856,7 +9885,7 @@
             </p14:xfrm>
           </p:contentPart>
         </mc:Choice>
-        <mc:Fallback>
+        <mc:Fallback xmlns="">
           <p:pic>
             <p:nvPicPr>
               <p:cNvPr id="5" name="Entrada de lápiz 4">
@@ -9887,8 +9916,8 @@
           </p:pic>
         </mc:Fallback>
       </mc:AlternateContent>
-      <mc:AlternateContent xmlns:mc="http://schemas.openxmlformats.org/markup-compatibility/2006">
-        <mc:Choice xmlns:p14="http://schemas.microsoft.com/office/powerpoint/2010/main" Requires="p14">
+      <mc:AlternateContent xmlns:mc="http://schemas.openxmlformats.org/markup-compatibility/2006" xmlns:p14="http://schemas.microsoft.com/office/powerpoint/2010/main">
+        <mc:Choice Requires="p14">
           <p:contentPart p14:bwMode="auto" r:id="rId5">
             <p14:nvContentPartPr>
               <p14:cNvPr id="6" name="Entrada de lápiz 5">
@@ -9907,7 +9936,7 @@
             </p14:xfrm>
           </p:contentPart>
         </mc:Choice>
-        <mc:Fallback>
+        <mc:Fallback xmlns="">
           <p:pic>
             <p:nvPicPr>
               <p:cNvPr id="6" name="Entrada de lápiz 5">
@@ -10023,8 +10052,8 @@
           </a:prstGeom>
         </p:spPr>
       </p:pic>
-      <mc:AlternateContent xmlns:mc="http://schemas.openxmlformats.org/markup-compatibility/2006">
-        <mc:Choice xmlns:p14="http://schemas.microsoft.com/office/powerpoint/2010/main" Requires="p14">
+      <mc:AlternateContent xmlns:mc="http://schemas.openxmlformats.org/markup-compatibility/2006" xmlns:p14="http://schemas.microsoft.com/office/powerpoint/2010/main">
+        <mc:Choice Requires="p14">
           <p:contentPart p14:bwMode="auto" r:id="rId3">
             <p14:nvContentPartPr>
               <p14:cNvPr id="5" name="Entrada de lápiz 4">
@@ -10043,7 +10072,7 @@
             </p14:xfrm>
           </p:contentPart>
         </mc:Choice>
-        <mc:Fallback>
+        <mc:Fallback xmlns="">
           <p:pic>
             <p:nvPicPr>
               <p:cNvPr id="5" name="Entrada de lápiz 4">
@@ -10299,8 +10328,8 @@
           </a:prstGeom>
         </p:spPr>
       </p:pic>
-      <mc:AlternateContent xmlns:mc="http://schemas.openxmlformats.org/markup-compatibility/2006">
-        <mc:Choice xmlns:p14="http://schemas.microsoft.com/office/powerpoint/2010/main" Requires="p14">
+      <mc:AlternateContent xmlns:mc="http://schemas.openxmlformats.org/markup-compatibility/2006" xmlns:p14="http://schemas.microsoft.com/office/powerpoint/2010/main">
+        <mc:Choice Requires="p14">
           <p:contentPart p14:bwMode="auto" r:id="rId3">
             <p14:nvContentPartPr>
               <p14:cNvPr id="5" name="Entrada de lápiz 4">
@@ -10319,7 +10348,7 @@
             </p14:xfrm>
           </p:contentPart>
         </mc:Choice>
-        <mc:Fallback>
+        <mc:Fallback xmlns="">
           <p:pic>
             <p:nvPicPr>
               <p:cNvPr id="5" name="Entrada de lápiz 4">
@@ -10350,8 +10379,8 @@
           </p:pic>
         </mc:Fallback>
       </mc:AlternateContent>
-      <mc:AlternateContent xmlns:mc="http://schemas.openxmlformats.org/markup-compatibility/2006">
-        <mc:Choice xmlns:p14="http://schemas.microsoft.com/office/powerpoint/2010/main" Requires="p14">
+      <mc:AlternateContent xmlns:mc="http://schemas.openxmlformats.org/markup-compatibility/2006" xmlns:p14="http://schemas.microsoft.com/office/powerpoint/2010/main">
+        <mc:Choice Requires="p14">
           <p:contentPart p14:bwMode="auto" r:id="rId5">
             <p14:nvContentPartPr>
               <p14:cNvPr id="6" name="Entrada de lápiz 5">
@@ -10370,7 +10399,7 @@
             </p14:xfrm>
           </p:contentPart>
         </mc:Choice>
-        <mc:Fallback>
+        <mc:Fallback xmlns="">
           <p:pic>
             <p:nvPicPr>
               <p:cNvPr id="6" name="Entrada de lápiz 5">
@@ -10486,8 +10515,8 @@
           </a:prstGeom>
         </p:spPr>
       </p:pic>
-      <mc:AlternateContent xmlns:mc="http://schemas.openxmlformats.org/markup-compatibility/2006">
-        <mc:Choice xmlns:p14="http://schemas.microsoft.com/office/powerpoint/2010/main" Requires="p14">
+      <mc:AlternateContent xmlns:mc="http://schemas.openxmlformats.org/markup-compatibility/2006" xmlns:p14="http://schemas.microsoft.com/office/powerpoint/2010/main">
+        <mc:Choice Requires="p14">
           <p:contentPart p14:bwMode="auto" r:id="rId3">
             <p14:nvContentPartPr>
               <p14:cNvPr id="5" name="Entrada de lápiz 4">
@@ -10506,7 +10535,7 @@
             </p14:xfrm>
           </p:contentPart>
         </mc:Choice>
-        <mc:Fallback>
+        <mc:Fallback xmlns="">
           <p:pic>
             <p:nvPicPr>
               <p:cNvPr id="5" name="Entrada de lápiz 4">
@@ -10695,8 +10724,8 @@
           </a:p>
         </p:txBody>
       </p:sp>
-      <mc:AlternateContent xmlns:mc="http://schemas.openxmlformats.org/markup-compatibility/2006">
-        <mc:Choice xmlns:p14="http://schemas.microsoft.com/office/powerpoint/2010/main" Requires="p14">
+      <mc:AlternateContent xmlns:mc="http://schemas.openxmlformats.org/markup-compatibility/2006" xmlns:p14="http://schemas.microsoft.com/office/powerpoint/2010/main">
+        <mc:Choice Requires="p14">
           <p:contentPart p14:bwMode="auto" r:id="rId3">
             <p14:nvContentPartPr>
               <p14:cNvPr id="6" name="Entrada de lápiz 5">
@@ -10715,7 +10744,7 @@
             </p14:xfrm>
           </p:contentPart>
         </mc:Choice>
-        <mc:Fallback>
+        <mc:Fallback xmlns="">
           <p:pic>
             <p:nvPicPr>
               <p:cNvPr id="6" name="Entrada de lápiz 5">
@@ -10886,8 +10915,8 @@
           </a:prstGeom>
         </p:spPr>
       </p:pic>
-      <mc:AlternateContent xmlns:mc="http://schemas.openxmlformats.org/markup-compatibility/2006">
-        <mc:Choice xmlns:p14="http://schemas.microsoft.com/office/powerpoint/2010/main" Requires="p14">
+      <mc:AlternateContent xmlns:mc="http://schemas.openxmlformats.org/markup-compatibility/2006" xmlns:p14="http://schemas.microsoft.com/office/powerpoint/2010/main">
+        <mc:Choice Requires="p14">
           <p:contentPart p14:bwMode="auto" r:id="rId3">
             <p14:nvContentPartPr>
               <p14:cNvPr id="5" name="Entrada de lápiz 4">
@@ -10906,7 +10935,7 @@
             </p14:xfrm>
           </p:contentPart>
         </mc:Choice>
-        <mc:Fallback>
+        <mc:Fallback xmlns="">
           <p:pic>
             <p:nvPicPr>
               <p:cNvPr id="5" name="Entrada de lápiz 4">
@@ -10937,8 +10966,8 @@
           </p:pic>
         </mc:Fallback>
       </mc:AlternateContent>
-      <mc:AlternateContent xmlns:mc="http://schemas.openxmlformats.org/markup-compatibility/2006">
-        <mc:Choice xmlns:p14="http://schemas.microsoft.com/office/powerpoint/2010/main" Requires="p14">
+      <mc:AlternateContent xmlns:mc="http://schemas.openxmlformats.org/markup-compatibility/2006" xmlns:p14="http://schemas.microsoft.com/office/powerpoint/2010/main">
+        <mc:Choice Requires="p14">
           <p:contentPart p14:bwMode="auto" r:id="rId5">
             <p14:nvContentPartPr>
               <p14:cNvPr id="6" name="Entrada de lápiz 5">
@@ -10957,7 +10986,7 @@
             </p14:xfrm>
           </p:contentPart>
         </mc:Choice>
-        <mc:Fallback>
+        <mc:Fallback xmlns="">
           <p:pic>
             <p:nvPicPr>
               <p:cNvPr id="6" name="Entrada de lápiz 5">
@@ -11076,8 +11105,8 @@
           </a:prstGeom>
         </p:spPr>
       </p:pic>
-      <mc:AlternateContent xmlns:mc="http://schemas.openxmlformats.org/markup-compatibility/2006">
-        <mc:Choice xmlns:p14="http://schemas.microsoft.com/office/powerpoint/2010/main" Requires="p14">
+      <mc:AlternateContent xmlns:mc="http://schemas.openxmlformats.org/markup-compatibility/2006" xmlns:p14="http://schemas.microsoft.com/office/powerpoint/2010/main">
+        <mc:Choice Requires="p14">
           <p:contentPart p14:bwMode="auto" r:id="rId3">
             <p14:nvContentPartPr>
               <p14:cNvPr id="5" name="Entrada de lápiz 4">
@@ -11096,7 +11125,7 @@
             </p14:xfrm>
           </p:contentPart>
         </mc:Choice>
-        <mc:Fallback>
+        <mc:Fallback xmlns="">
           <p:pic>
             <p:nvPicPr>
               <p:cNvPr id="5" name="Entrada de lápiz 4">
@@ -11215,8 +11244,8 @@
           </a:prstGeom>
         </p:spPr>
       </p:pic>
-      <mc:AlternateContent xmlns:mc="http://schemas.openxmlformats.org/markup-compatibility/2006">
-        <mc:Choice xmlns:p14="http://schemas.microsoft.com/office/powerpoint/2010/main" Requires="p14">
+      <mc:AlternateContent xmlns:mc="http://schemas.openxmlformats.org/markup-compatibility/2006" xmlns:p14="http://schemas.microsoft.com/office/powerpoint/2010/main">
+        <mc:Choice Requires="p14">
           <p:contentPart p14:bwMode="auto" r:id="rId3">
             <p14:nvContentPartPr>
               <p14:cNvPr id="7" name="Entrada de lápiz 6">
@@ -11235,7 +11264,7 @@
             </p14:xfrm>
           </p:contentPart>
         </mc:Choice>
-        <mc:Fallback>
+        <mc:Fallback xmlns="">
           <p:pic>
             <p:nvPicPr>
               <p:cNvPr id="7" name="Entrada de lápiz 6">
@@ -11389,8 +11418,8 @@
           </a:prstGeom>
         </p:spPr>
       </p:pic>
-      <mc:AlternateContent xmlns:mc="http://schemas.openxmlformats.org/markup-compatibility/2006">
-        <mc:Choice xmlns:p14="http://schemas.microsoft.com/office/powerpoint/2010/main" Requires="p14">
+      <mc:AlternateContent xmlns:mc="http://schemas.openxmlformats.org/markup-compatibility/2006" xmlns:p14="http://schemas.microsoft.com/office/powerpoint/2010/main">
+        <mc:Choice Requires="p14">
           <p:contentPart p14:bwMode="auto" r:id="rId3">
             <p14:nvContentPartPr>
               <p14:cNvPr id="5" name="Entrada de lápiz 4">
@@ -11409,7 +11438,7 @@
             </p14:xfrm>
           </p:contentPart>
         </mc:Choice>
-        <mc:Fallback>
+        <mc:Fallback xmlns="">
           <p:pic>
             <p:nvPicPr>
               <p:cNvPr id="5" name="Entrada de lápiz 4">
@@ -11560,8 +11589,8 @@
           </a:prstGeom>
         </p:spPr>
       </p:pic>
-      <mc:AlternateContent xmlns:mc="http://schemas.openxmlformats.org/markup-compatibility/2006">
-        <mc:Choice xmlns:p14="http://schemas.microsoft.com/office/powerpoint/2010/main" Requires="p14">
+      <mc:AlternateContent xmlns:mc="http://schemas.openxmlformats.org/markup-compatibility/2006" xmlns:p14="http://schemas.microsoft.com/office/powerpoint/2010/main">
+        <mc:Choice Requires="p14">
           <p:contentPart p14:bwMode="auto" r:id="rId3">
             <p14:nvContentPartPr>
               <p14:cNvPr id="5" name="Entrada de lápiz 4">
@@ -11580,7 +11609,7 @@
             </p14:xfrm>
           </p:contentPart>
         </mc:Choice>
-        <mc:Fallback>
+        <mc:Fallback xmlns="">
           <p:pic>
             <p:nvPicPr>
               <p:cNvPr id="5" name="Entrada de lápiz 4">
@@ -11611,8 +11640,8 @@
           </p:pic>
         </mc:Fallback>
       </mc:AlternateContent>
-      <mc:AlternateContent xmlns:mc="http://schemas.openxmlformats.org/markup-compatibility/2006">
-        <mc:Choice xmlns:p14="http://schemas.microsoft.com/office/powerpoint/2010/main" Requires="p14">
+      <mc:AlternateContent xmlns:mc="http://schemas.openxmlformats.org/markup-compatibility/2006" xmlns:p14="http://schemas.microsoft.com/office/powerpoint/2010/main">
+        <mc:Choice Requires="p14">
           <p:contentPart p14:bwMode="auto" r:id="rId5">
             <p14:nvContentPartPr>
               <p14:cNvPr id="6" name="Entrada de lápiz 5">
@@ -11631,7 +11660,7 @@
             </p14:xfrm>
           </p:contentPart>
         </mc:Choice>
-        <mc:Fallback>
+        <mc:Fallback xmlns="">
           <p:pic>
             <p:nvPicPr>
               <p:cNvPr id="6" name="Entrada de lápiz 5">
@@ -12138,8 +12167,8 @@
           </a:prstGeom>
         </p:spPr>
       </p:pic>
-      <mc:AlternateContent xmlns:mc="http://schemas.openxmlformats.org/markup-compatibility/2006">
-        <mc:Choice xmlns:p14="http://schemas.microsoft.com/office/powerpoint/2010/main" Requires="p14">
+      <mc:AlternateContent xmlns:mc="http://schemas.openxmlformats.org/markup-compatibility/2006" xmlns:p14="http://schemas.microsoft.com/office/powerpoint/2010/main">
+        <mc:Choice Requires="p14">
           <p:contentPart p14:bwMode="auto" r:id="rId3">
             <p14:nvContentPartPr>
               <p14:cNvPr id="5" name="Entrada de lápiz 4">
@@ -12158,7 +12187,7 @@
             </p14:xfrm>
           </p:contentPart>
         </mc:Choice>
-        <mc:Fallback>
+        <mc:Fallback xmlns="">
           <p:pic>
             <p:nvPicPr>
               <p:cNvPr id="5" name="Entrada de lápiz 4">
@@ -12277,8 +12306,8 @@
           </a:prstGeom>
         </p:spPr>
       </p:pic>
-      <mc:AlternateContent xmlns:mc="http://schemas.openxmlformats.org/markup-compatibility/2006">
-        <mc:Choice xmlns:p14="http://schemas.microsoft.com/office/powerpoint/2010/main" Requires="p14">
+      <mc:AlternateContent xmlns:mc="http://schemas.openxmlformats.org/markup-compatibility/2006" xmlns:p14="http://schemas.microsoft.com/office/powerpoint/2010/main">
+        <mc:Choice Requires="p14">
           <p:contentPart p14:bwMode="auto" r:id="rId3">
             <p14:nvContentPartPr>
               <p14:cNvPr id="5" name="Entrada de lápiz 4">
@@ -12297,7 +12326,7 @@
             </p14:xfrm>
           </p:contentPart>
         </mc:Choice>
-        <mc:Fallback>
+        <mc:Fallback xmlns="">
           <p:pic>
             <p:nvPicPr>
               <p:cNvPr id="5" name="Entrada de lápiz 4">
@@ -12328,8 +12357,8 @@
           </p:pic>
         </mc:Fallback>
       </mc:AlternateContent>
-      <mc:AlternateContent xmlns:mc="http://schemas.openxmlformats.org/markup-compatibility/2006">
-        <mc:Choice xmlns:p14="http://schemas.microsoft.com/office/powerpoint/2010/main" Requires="p14">
+      <mc:AlternateContent xmlns:mc="http://schemas.openxmlformats.org/markup-compatibility/2006" xmlns:p14="http://schemas.microsoft.com/office/powerpoint/2010/main">
+        <mc:Choice Requires="p14">
           <p:contentPart p14:bwMode="auto" r:id="rId5">
             <p14:nvContentPartPr>
               <p14:cNvPr id="6" name="Entrada de lápiz 5">
@@ -12348,7 +12377,7 @@
             </p14:xfrm>
           </p:contentPart>
         </mc:Choice>
-        <mc:Fallback>
+        <mc:Fallback xmlns="">
           <p:pic>
             <p:nvPicPr>
               <p:cNvPr id="6" name="Entrada de lápiz 5">
@@ -12379,8 +12408,8 @@
           </p:pic>
         </mc:Fallback>
       </mc:AlternateContent>
-      <mc:AlternateContent xmlns:mc="http://schemas.openxmlformats.org/markup-compatibility/2006">
-        <mc:Choice xmlns:p14="http://schemas.microsoft.com/office/powerpoint/2010/main" Requires="p14">
+      <mc:AlternateContent xmlns:mc="http://schemas.openxmlformats.org/markup-compatibility/2006" xmlns:p14="http://schemas.microsoft.com/office/powerpoint/2010/main">
+        <mc:Choice Requires="p14">
           <p:contentPart p14:bwMode="auto" r:id="rId7">
             <p14:nvContentPartPr>
               <p14:cNvPr id="7" name="Entrada de lápiz 6">
@@ -12399,7 +12428,7 @@
             </p14:xfrm>
           </p:contentPart>
         </mc:Choice>
-        <mc:Fallback>
+        <mc:Fallback xmlns="">
           <p:pic>
             <p:nvPicPr>
               <p:cNvPr id="7" name="Entrada de lápiz 6">
@@ -12485,6 +12514,157 @@
           </a:p>
         </p:txBody>
       </p:sp>
+      <p:pic>
+        <p:nvPicPr>
+          <p:cNvPr id="4" name="Imagen 3">
+            <a:extLst>
+              <a:ext uri="{FF2B5EF4-FFF2-40B4-BE49-F238E27FC236}">
+                <a16:creationId xmlns:a16="http://schemas.microsoft.com/office/drawing/2014/main" id="{9352A856-88FB-6173-259A-76FD5A6FF558}"/>
+              </a:ext>
+            </a:extLst>
+          </p:cNvPr>
+          <p:cNvPicPr>
+            <a:picLocks noChangeAspect="1"/>
+          </p:cNvPicPr>
+          <p:nvPr/>
+        </p:nvPicPr>
+        <p:blipFill>
+          <a:blip r:embed="rId2"/>
+          <a:stretch>
+            <a:fillRect/>
+          </a:stretch>
+        </p:blipFill>
+        <p:spPr>
+          <a:xfrm>
+            <a:off x="729859" y="406473"/>
+            <a:ext cx="5150437" cy="6045054"/>
+          </a:xfrm>
+          <a:prstGeom prst="rect">
+            <a:avLst/>
+          </a:prstGeom>
+        </p:spPr>
+      </p:pic>
+      <mc:AlternateContent xmlns:mc="http://schemas.openxmlformats.org/markup-compatibility/2006">
+        <mc:Choice xmlns:p14="http://schemas.microsoft.com/office/powerpoint/2010/main" Requires="p14">
+          <p:contentPart p14:bwMode="auto" r:id="rId3">
+            <p14:nvContentPartPr>
+              <p14:cNvPr id="5" name="Entrada de lápiz 4">
+                <a:extLst>
+                  <a:ext uri="{FF2B5EF4-FFF2-40B4-BE49-F238E27FC236}">
+                    <a16:creationId xmlns:a16="http://schemas.microsoft.com/office/drawing/2014/main" id="{A26CFDAA-FA0B-00BE-A3B8-AB4C9B84FD74}"/>
+                  </a:ext>
+                </a:extLst>
+              </p14:cNvPr>
+              <p14:cNvContentPartPr/>
+              <p14:nvPr/>
+            </p14:nvContentPartPr>
+            <p14:xfrm>
+              <a:off x="3769394" y="2647468"/>
+              <a:ext cx="1935360" cy="435960"/>
+            </p14:xfrm>
+          </p:contentPart>
+        </mc:Choice>
+        <mc:Fallback>
+          <p:pic>
+            <p:nvPicPr>
+              <p:cNvPr id="5" name="Entrada de lápiz 4">
+                <a:extLst>
+                  <a:ext uri="{FF2B5EF4-FFF2-40B4-BE49-F238E27FC236}">
+                    <a16:creationId xmlns:a16="http://schemas.microsoft.com/office/drawing/2014/main" id="{A26CFDAA-FA0B-00BE-A3B8-AB4C9B84FD74}"/>
+                  </a:ext>
+                </a:extLst>
+              </p:cNvPr>
+              <p:cNvPicPr/>
+              <p:nvPr/>
+            </p:nvPicPr>
+            <p:blipFill>
+              <a:blip r:embed="rId4"/>
+              <a:stretch>
+                <a:fillRect/>
+              </a:stretch>
+            </p:blipFill>
+            <p:spPr>
+              <a:xfrm>
+                <a:off x="3715394" y="2539828"/>
+                <a:ext cx="2043000" cy="651600"/>
+              </a:xfrm>
+              <a:prstGeom prst="rect">
+                <a:avLst/>
+              </a:prstGeom>
+            </p:spPr>
+          </p:pic>
+        </mc:Fallback>
+      </mc:AlternateContent>
+      <p:sp>
+        <p:nvSpPr>
+          <p:cNvPr id="8" name="CuadroTexto 7">
+            <a:extLst>
+              <a:ext uri="{FF2B5EF4-FFF2-40B4-BE49-F238E27FC236}">
+                <a16:creationId xmlns:a16="http://schemas.microsoft.com/office/drawing/2014/main" id="{EE57ECD1-AB22-2730-D75D-AF5D4E3F64C0}"/>
+              </a:ext>
+            </a:extLst>
+          </p:cNvPr>
+          <p:cNvSpPr txBox="1"/>
+          <p:nvPr/>
+        </p:nvSpPr>
+        <p:spPr>
+          <a:xfrm>
+            <a:off x="6521052" y="2145094"/>
+            <a:ext cx="3002775" cy="923330"/>
+          </a:xfrm>
+          <a:prstGeom prst="rect">
+            <a:avLst/>
+          </a:prstGeom>
+          <a:noFill/>
+        </p:spPr>
+        <p:txBody>
+          <a:bodyPr wrap="square" rtlCol="0">
+            <a:spAutoFit/>
+          </a:bodyPr>
+          <a:lstStyle/>
+          <a:p>
+            <a:r>
+              <a:rPr lang="es-GT" dirty="0"/>
+              <a:t>IMPORTANTE EDSTOS ESTILOS DE MUROS NO PERMITEN MODIFICAR </a:t>
+            </a:r>
+          </a:p>
+        </p:txBody>
+      </p:sp>
+      <p:sp>
+        <p:nvSpPr>
+          <p:cNvPr id="9" name="CuadroTexto 8">
+            <a:extLst>
+              <a:ext uri="{FF2B5EF4-FFF2-40B4-BE49-F238E27FC236}">
+                <a16:creationId xmlns:a16="http://schemas.microsoft.com/office/drawing/2014/main" id="{CF254524-98C6-91E6-2DEF-4A80E3D451CD}"/>
+              </a:ext>
+            </a:extLst>
+          </p:cNvPr>
+          <p:cNvSpPr txBox="1"/>
+          <p:nvPr/>
+        </p:nvSpPr>
+        <p:spPr>
+          <a:xfrm>
+            <a:off x="6639951" y="3713871"/>
+            <a:ext cx="2532184" cy="1200329"/>
+          </a:xfrm>
+          <a:prstGeom prst="rect">
+            <a:avLst/>
+          </a:prstGeom>
+          <a:noFill/>
+        </p:spPr>
+        <p:txBody>
+          <a:bodyPr wrap="square" rtlCol="0">
+            <a:spAutoFit/>
+          </a:bodyPr>
+          <a:lstStyle/>
+          <a:p>
+            <a:r>
+              <a:rPr lang="es-GT" dirty="0"/>
+              <a:t>SOLO SE PUEDE MODIFICAR CUANDO SE BORRA TODO Y VOLVER EMPEZAR </a:t>
+            </a:r>
+          </a:p>
+        </p:txBody>
+      </p:sp>
     </p:spTree>
     <p:extLst>
       <p:ext uri="{BB962C8B-B14F-4D97-AF65-F5344CB8AC3E}">
@@ -12536,10 +12716,43 @@
           <a:bodyPr/>
           <a:lstStyle/>
           <a:p>
-            <a:endParaRPr lang="es-GT"/>
-          </a:p>
-        </p:txBody>
-      </p:sp>
+            <a:r>
+              <a:rPr lang="es-GT" dirty="0"/>
+              <a:t>DESPUES DE HABER BORRAD</a:t>
+            </a:r>
+          </a:p>
+        </p:txBody>
+      </p:sp>
+      <p:pic>
+        <p:nvPicPr>
+          <p:cNvPr id="4" name="Imagen 3">
+            <a:extLst>
+              <a:ext uri="{FF2B5EF4-FFF2-40B4-BE49-F238E27FC236}">
+                <a16:creationId xmlns:a16="http://schemas.microsoft.com/office/drawing/2014/main" id="{B6A73143-11EC-7047-735D-3C24030BE34F}"/>
+              </a:ext>
+            </a:extLst>
+          </p:cNvPr>
+          <p:cNvPicPr>
+            <a:picLocks noChangeAspect="1"/>
+          </p:cNvPicPr>
+          <p:nvPr/>
+        </p:nvPicPr>
+        <p:blipFill>
+          <a:blip r:embed="rId2"/>
+          <a:stretch>
+            <a:fillRect/>
+          </a:stretch>
+        </p:blipFill>
+        <p:spPr>
+          <a:xfrm>
+            <a:off x="3849898" y="2148869"/>
+            <a:ext cx="3620005" cy="4344006"/>
+          </a:xfrm>
+          <a:prstGeom prst="rect">
+            <a:avLst/>
+          </a:prstGeom>
+        </p:spPr>
+      </p:pic>
     </p:spTree>
     <p:extLst>
       <p:ext uri="{BB962C8B-B14F-4D97-AF65-F5344CB8AC3E}">
@@ -12591,10 +12804,43 @@
           <a:bodyPr/>
           <a:lstStyle/>
           <a:p>
-            <a:endParaRPr lang="es-GT"/>
-          </a:p>
-        </p:txBody>
-      </p:sp>
+            <a:r>
+              <a:rPr lang="es-GT" dirty="0"/>
+              <a:t>MODIFICAMOS MURO </a:t>
+            </a:r>
+          </a:p>
+        </p:txBody>
+      </p:sp>
+      <p:pic>
+        <p:nvPicPr>
+          <p:cNvPr id="4" name="Imagen 3">
+            <a:extLst>
+              <a:ext uri="{FF2B5EF4-FFF2-40B4-BE49-F238E27FC236}">
+                <a16:creationId xmlns:a16="http://schemas.microsoft.com/office/drawing/2014/main" id="{EE8470F6-A149-E8DD-C957-54EE97AA3DC2}"/>
+              </a:ext>
+            </a:extLst>
+          </p:cNvPr>
+          <p:cNvPicPr>
+            <a:picLocks noChangeAspect="1"/>
+          </p:cNvPicPr>
+          <p:nvPr/>
+        </p:nvPicPr>
+        <p:blipFill>
+          <a:blip r:embed="rId2"/>
+          <a:stretch>
+            <a:fillRect/>
+          </a:stretch>
+        </p:blipFill>
+        <p:spPr>
+          <a:xfrm>
+            <a:off x="800686" y="1690688"/>
+            <a:ext cx="9488224" cy="4610743"/>
+          </a:xfrm>
+          <a:prstGeom prst="rect">
+            <a:avLst/>
+          </a:prstGeom>
+        </p:spPr>
+      </p:pic>
     </p:spTree>
     <p:extLst>
       <p:ext uri="{BB962C8B-B14F-4D97-AF65-F5344CB8AC3E}">
@@ -12646,10 +12892,43 @@
           <a:bodyPr/>
           <a:lstStyle/>
           <a:p>
-            <a:endParaRPr lang="es-GT"/>
-          </a:p>
-        </p:txBody>
-      </p:sp>
+            <a:r>
+              <a:rPr lang="es-GT" dirty="0"/>
+              <a:t>ASI QUEDOOOOO </a:t>
+            </a:r>
+          </a:p>
+        </p:txBody>
+      </p:sp>
+      <p:pic>
+        <p:nvPicPr>
+          <p:cNvPr id="4" name="Imagen 3">
+            <a:extLst>
+              <a:ext uri="{FF2B5EF4-FFF2-40B4-BE49-F238E27FC236}">
+                <a16:creationId xmlns:a16="http://schemas.microsoft.com/office/drawing/2014/main" id="{5C95904F-A5CD-9A54-B238-BB3CD36F0773}"/>
+              </a:ext>
+            </a:extLst>
+          </p:cNvPr>
+          <p:cNvPicPr>
+            <a:picLocks noChangeAspect="1"/>
+          </p:cNvPicPr>
+          <p:nvPr/>
+        </p:nvPicPr>
+        <p:blipFill>
+          <a:blip r:embed="rId2"/>
+          <a:stretch>
+            <a:fillRect/>
+          </a:stretch>
+        </p:blipFill>
+        <p:spPr>
+          <a:xfrm>
+            <a:off x="1640582" y="2460070"/>
+            <a:ext cx="6895027" cy="3828188"/>
+          </a:xfrm>
+          <a:prstGeom prst="rect">
+            <a:avLst/>
+          </a:prstGeom>
+        </p:spPr>
+      </p:pic>
     </p:spTree>
     <p:extLst>
       <p:ext uri="{BB962C8B-B14F-4D97-AF65-F5344CB8AC3E}">
